--- a/SemestralPPT.pptx
+++ b/SemestralPPT.pptx
@@ -4,6 +4,9 @@
   <p:sldMasterIdLst>
     <p:sldMasterId id="2147483660" r:id="rId1"/>
   </p:sldMasterIdLst>
+  <p:notesMasterIdLst>
+    <p:notesMasterId r:id="rId17"/>
+  </p:notesMasterIdLst>
   <p:sldIdLst>
     <p:sldId id="258" r:id="rId2"/>
     <p:sldId id="269" r:id="rId3"/>
@@ -11,14 +14,15 @@
     <p:sldId id="266" r:id="rId5"/>
     <p:sldId id="262" r:id="rId6"/>
     <p:sldId id="270" r:id="rId7"/>
-    <p:sldId id="271" r:id="rId8"/>
-    <p:sldId id="263" r:id="rId9"/>
-    <p:sldId id="268" r:id="rId10"/>
-    <p:sldId id="264" r:id="rId11"/>
-    <p:sldId id="273" r:id="rId12"/>
-    <p:sldId id="265" r:id="rId13"/>
-    <p:sldId id="272" r:id="rId14"/>
-    <p:sldId id="274" r:id="rId15"/>
+    <p:sldId id="263" r:id="rId8"/>
+    <p:sldId id="275" r:id="rId9"/>
+    <p:sldId id="273" r:id="rId10"/>
+    <p:sldId id="268" r:id="rId11"/>
+    <p:sldId id="264" r:id="rId12"/>
+    <p:sldId id="276" r:id="rId13"/>
+    <p:sldId id="271" r:id="rId14"/>
+    <p:sldId id="265" r:id="rId15"/>
+    <p:sldId id="272" r:id="rId16"/>
   </p:sldIdLst>
   <p:sldSz cx="12192000" cy="6858000"/>
   <p:notesSz cx="6858000" cy="9144000"/>
@@ -123,6 +127,543 @@
     </p:ext>
   </p:extLst>
 </p:presentation>
+</file>
+
+<file path=ppt/notesMasters/notesMaster1.xml><?xml version="1.0" encoding="utf-8"?>
+<p:notesMaster xmlns:a="http://schemas.openxmlformats.org/drawingml/2006/main" xmlns:r="http://schemas.openxmlformats.org/officeDocument/2006/relationships" xmlns:p="http://schemas.openxmlformats.org/presentationml/2006/main">
+  <p:cSld>
+    <p:bg>
+      <p:bgRef idx="1001">
+        <a:schemeClr val="bg1"/>
+      </p:bgRef>
+    </p:bg>
+    <p:spTree>
+      <p:nvGrpSpPr>
+        <p:cNvPr id="1" name=""/>
+        <p:cNvGrpSpPr/>
+        <p:nvPr/>
+      </p:nvGrpSpPr>
+      <p:grpSpPr>
+        <a:xfrm>
+          <a:off x="0" y="0"/>
+          <a:ext cx="0" cy="0"/>
+          <a:chOff x="0" y="0"/>
+          <a:chExt cx="0" cy="0"/>
+        </a:xfrm>
+      </p:grpSpPr>
+      <p:sp>
+        <p:nvSpPr>
+          <p:cNvPr id="2" name="Header Placeholder 1"/>
+          <p:cNvSpPr>
+            <a:spLocks noGrp="1"/>
+          </p:cNvSpPr>
+          <p:nvPr>
+            <p:ph type="hdr" sz="quarter"/>
+          </p:nvPr>
+        </p:nvSpPr>
+        <p:spPr>
+          <a:xfrm>
+            <a:off x="0" y="0"/>
+            <a:ext cx="2971800" cy="458788"/>
+          </a:xfrm>
+          <a:prstGeom prst="rect">
+            <a:avLst/>
+          </a:prstGeom>
+        </p:spPr>
+        <p:txBody>
+          <a:bodyPr vert="horz" lIns="91440" tIns="45720" rIns="91440" bIns="45720" rtlCol="0"/>
+          <a:lstStyle>
+            <a:lvl1pPr algn="l">
+              <a:defRPr sz="1200"/>
+            </a:lvl1pPr>
+          </a:lstStyle>
+          <a:p>
+            <a:endParaRPr lang="en-CZ"/>
+          </a:p>
+        </p:txBody>
+      </p:sp>
+      <p:sp>
+        <p:nvSpPr>
+          <p:cNvPr id="3" name="Date Placeholder 2"/>
+          <p:cNvSpPr>
+            <a:spLocks noGrp="1"/>
+          </p:cNvSpPr>
+          <p:nvPr>
+            <p:ph type="dt" idx="1"/>
+          </p:nvPr>
+        </p:nvSpPr>
+        <p:spPr>
+          <a:xfrm>
+            <a:off x="3884613" y="0"/>
+            <a:ext cx="2971800" cy="458788"/>
+          </a:xfrm>
+          <a:prstGeom prst="rect">
+            <a:avLst/>
+          </a:prstGeom>
+        </p:spPr>
+        <p:txBody>
+          <a:bodyPr vert="horz" lIns="91440" tIns="45720" rIns="91440" bIns="45720" rtlCol="0"/>
+          <a:lstStyle>
+            <a:lvl1pPr algn="r">
+              <a:defRPr sz="1200"/>
+            </a:lvl1pPr>
+          </a:lstStyle>
+          <a:p>
+            <a:fld id="{EB803CE5-35BB-2543-BE96-2C78290A7AE8}" type="datetimeFigureOut">
+              <a:rPr lang="en-CZ" smtClean="0"/>
+              <a:t>05.02.2024</a:t>
+            </a:fld>
+            <a:endParaRPr lang="en-CZ"/>
+          </a:p>
+        </p:txBody>
+      </p:sp>
+      <p:sp>
+        <p:nvSpPr>
+          <p:cNvPr id="4" name="Slide Image Placeholder 3"/>
+          <p:cNvSpPr>
+            <a:spLocks noGrp="1" noRot="1" noChangeAspect="1"/>
+          </p:cNvSpPr>
+          <p:nvPr>
+            <p:ph type="sldImg" idx="2"/>
+          </p:nvPr>
+        </p:nvSpPr>
+        <p:spPr>
+          <a:xfrm>
+            <a:off x="685800" y="1143000"/>
+            <a:ext cx="5486400" cy="3086100"/>
+          </a:xfrm>
+          <a:prstGeom prst="rect">
+            <a:avLst/>
+          </a:prstGeom>
+          <a:noFill/>
+          <a:ln w="12700">
+            <a:solidFill>
+              <a:prstClr val="black"/>
+            </a:solidFill>
+          </a:ln>
+        </p:spPr>
+        <p:txBody>
+          <a:bodyPr vert="horz" lIns="91440" tIns="45720" rIns="91440" bIns="45720" rtlCol="0" anchor="ctr"/>
+          <a:lstStyle/>
+          <a:p>
+            <a:endParaRPr lang="en-CZ"/>
+          </a:p>
+        </p:txBody>
+      </p:sp>
+      <p:sp>
+        <p:nvSpPr>
+          <p:cNvPr id="5" name="Notes Placeholder 4"/>
+          <p:cNvSpPr>
+            <a:spLocks noGrp="1"/>
+          </p:cNvSpPr>
+          <p:nvPr>
+            <p:ph type="body" sz="quarter" idx="3"/>
+          </p:nvPr>
+        </p:nvSpPr>
+        <p:spPr>
+          <a:xfrm>
+            <a:off x="685800" y="4400550"/>
+            <a:ext cx="5486400" cy="3600450"/>
+          </a:xfrm>
+          <a:prstGeom prst="rect">
+            <a:avLst/>
+          </a:prstGeom>
+        </p:spPr>
+        <p:txBody>
+          <a:bodyPr vert="horz" lIns="91440" tIns="45720" rIns="91440" bIns="45720" rtlCol="0"/>
+          <a:lstStyle/>
+          <a:p>
+            <a:pPr lvl="0"/>
+            <a:r>
+              <a:rPr lang="en-GB"/>
+              <a:t>Click to edit Master text styles</a:t>
+            </a:r>
+          </a:p>
+          <a:p>
+            <a:pPr lvl="1"/>
+            <a:r>
+              <a:rPr lang="en-GB"/>
+              <a:t>Second level</a:t>
+            </a:r>
+          </a:p>
+          <a:p>
+            <a:pPr lvl="2"/>
+            <a:r>
+              <a:rPr lang="en-GB"/>
+              <a:t>Third level</a:t>
+            </a:r>
+          </a:p>
+          <a:p>
+            <a:pPr lvl="3"/>
+            <a:r>
+              <a:rPr lang="en-GB"/>
+              <a:t>Fourth level</a:t>
+            </a:r>
+          </a:p>
+          <a:p>
+            <a:pPr lvl="4"/>
+            <a:r>
+              <a:rPr lang="en-GB"/>
+              <a:t>Fifth level</a:t>
+            </a:r>
+            <a:endParaRPr lang="en-CZ"/>
+          </a:p>
+        </p:txBody>
+      </p:sp>
+      <p:sp>
+        <p:nvSpPr>
+          <p:cNvPr id="6" name="Footer Placeholder 5"/>
+          <p:cNvSpPr>
+            <a:spLocks noGrp="1"/>
+          </p:cNvSpPr>
+          <p:nvPr>
+            <p:ph type="ftr" sz="quarter" idx="4"/>
+          </p:nvPr>
+        </p:nvSpPr>
+        <p:spPr>
+          <a:xfrm>
+            <a:off x="0" y="8685213"/>
+            <a:ext cx="2971800" cy="458787"/>
+          </a:xfrm>
+          <a:prstGeom prst="rect">
+            <a:avLst/>
+          </a:prstGeom>
+        </p:spPr>
+        <p:txBody>
+          <a:bodyPr vert="horz" lIns="91440" tIns="45720" rIns="91440" bIns="45720" rtlCol="0" anchor="b"/>
+          <a:lstStyle>
+            <a:lvl1pPr algn="l">
+              <a:defRPr sz="1200"/>
+            </a:lvl1pPr>
+          </a:lstStyle>
+          <a:p>
+            <a:endParaRPr lang="en-CZ"/>
+          </a:p>
+        </p:txBody>
+      </p:sp>
+      <p:sp>
+        <p:nvSpPr>
+          <p:cNvPr id="7" name="Slide Number Placeholder 6"/>
+          <p:cNvSpPr>
+            <a:spLocks noGrp="1"/>
+          </p:cNvSpPr>
+          <p:nvPr>
+            <p:ph type="sldNum" sz="quarter" idx="5"/>
+          </p:nvPr>
+        </p:nvSpPr>
+        <p:spPr>
+          <a:xfrm>
+            <a:off x="3884613" y="8685213"/>
+            <a:ext cx="2971800" cy="458787"/>
+          </a:xfrm>
+          <a:prstGeom prst="rect">
+            <a:avLst/>
+          </a:prstGeom>
+        </p:spPr>
+        <p:txBody>
+          <a:bodyPr vert="horz" lIns="91440" tIns="45720" rIns="91440" bIns="45720" rtlCol="0" anchor="b"/>
+          <a:lstStyle>
+            <a:lvl1pPr algn="r">
+              <a:defRPr sz="1200"/>
+            </a:lvl1pPr>
+          </a:lstStyle>
+          <a:p>
+            <a:fld id="{D6A71191-B569-1341-A34F-AEBAB377C1A0}" type="slidenum">
+              <a:rPr lang="en-CZ" smtClean="0"/>
+              <a:t>‹#›</a:t>
+            </a:fld>
+            <a:endParaRPr lang="en-CZ"/>
+          </a:p>
+        </p:txBody>
+      </p:sp>
+    </p:spTree>
+    <p:extLst>
+      <p:ext uri="{BB962C8B-B14F-4D97-AF65-F5344CB8AC3E}">
+        <p14:creationId xmlns:p14="http://schemas.microsoft.com/office/powerpoint/2010/main" val="359983378"/>
+      </p:ext>
+    </p:extLst>
+  </p:cSld>
+  <p:clrMap bg1="lt1" tx1="dk1" bg2="lt2" tx2="dk2" accent1="accent1" accent2="accent2" accent3="accent3" accent4="accent4" accent5="accent5" accent6="accent6" hlink="hlink" folHlink="folHlink"/>
+  <p:notesStyle>
+    <a:lvl1pPr marL="0" algn="l" defTabSz="914400" rtl="0" eaLnBrk="1" latinLnBrk="0" hangingPunct="1">
+      <a:defRPr sz="1200" kern="1200">
+        <a:solidFill>
+          <a:schemeClr val="tx1"/>
+        </a:solidFill>
+        <a:latin typeface="+mn-lt"/>
+        <a:ea typeface="+mn-ea"/>
+        <a:cs typeface="+mn-cs"/>
+      </a:defRPr>
+    </a:lvl1pPr>
+    <a:lvl2pPr marL="457200" algn="l" defTabSz="914400" rtl="0" eaLnBrk="1" latinLnBrk="0" hangingPunct="1">
+      <a:defRPr sz="1200" kern="1200">
+        <a:solidFill>
+          <a:schemeClr val="tx1"/>
+        </a:solidFill>
+        <a:latin typeface="+mn-lt"/>
+        <a:ea typeface="+mn-ea"/>
+        <a:cs typeface="+mn-cs"/>
+      </a:defRPr>
+    </a:lvl2pPr>
+    <a:lvl3pPr marL="914400" algn="l" defTabSz="914400" rtl="0" eaLnBrk="1" latinLnBrk="0" hangingPunct="1">
+      <a:defRPr sz="1200" kern="1200">
+        <a:solidFill>
+          <a:schemeClr val="tx1"/>
+        </a:solidFill>
+        <a:latin typeface="+mn-lt"/>
+        <a:ea typeface="+mn-ea"/>
+        <a:cs typeface="+mn-cs"/>
+      </a:defRPr>
+    </a:lvl3pPr>
+    <a:lvl4pPr marL="1371600" algn="l" defTabSz="914400" rtl="0" eaLnBrk="1" latinLnBrk="0" hangingPunct="1">
+      <a:defRPr sz="1200" kern="1200">
+        <a:solidFill>
+          <a:schemeClr val="tx1"/>
+        </a:solidFill>
+        <a:latin typeface="+mn-lt"/>
+        <a:ea typeface="+mn-ea"/>
+        <a:cs typeface="+mn-cs"/>
+      </a:defRPr>
+    </a:lvl4pPr>
+    <a:lvl5pPr marL="1828800" algn="l" defTabSz="914400" rtl="0" eaLnBrk="1" latinLnBrk="0" hangingPunct="1">
+      <a:defRPr sz="1200" kern="1200">
+        <a:solidFill>
+          <a:schemeClr val="tx1"/>
+        </a:solidFill>
+        <a:latin typeface="+mn-lt"/>
+        <a:ea typeface="+mn-ea"/>
+        <a:cs typeface="+mn-cs"/>
+      </a:defRPr>
+    </a:lvl5pPr>
+    <a:lvl6pPr marL="2286000" algn="l" defTabSz="914400" rtl="0" eaLnBrk="1" latinLnBrk="0" hangingPunct="1">
+      <a:defRPr sz="1200" kern="1200">
+        <a:solidFill>
+          <a:schemeClr val="tx1"/>
+        </a:solidFill>
+        <a:latin typeface="+mn-lt"/>
+        <a:ea typeface="+mn-ea"/>
+        <a:cs typeface="+mn-cs"/>
+      </a:defRPr>
+    </a:lvl6pPr>
+    <a:lvl7pPr marL="2743200" algn="l" defTabSz="914400" rtl="0" eaLnBrk="1" latinLnBrk="0" hangingPunct="1">
+      <a:defRPr sz="1200" kern="1200">
+        <a:solidFill>
+          <a:schemeClr val="tx1"/>
+        </a:solidFill>
+        <a:latin typeface="+mn-lt"/>
+        <a:ea typeface="+mn-ea"/>
+        <a:cs typeface="+mn-cs"/>
+      </a:defRPr>
+    </a:lvl7pPr>
+    <a:lvl8pPr marL="3200400" algn="l" defTabSz="914400" rtl="0" eaLnBrk="1" latinLnBrk="0" hangingPunct="1">
+      <a:defRPr sz="1200" kern="1200">
+        <a:solidFill>
+          <a:schemeClr val="tx1"/>
+        </a:solidFill>
+        <a:latin typeface="+mn-lt"/>
+        <a:ea typeface="+mn-ea"/>
+        <a:cs typeface="+mn-cs"/>
+      </a:defRPr>
+    </a:lvl8pPr>
+    <a:lvl9pPr marL="3657600" algn="l" defTabSz="914400" rtl="0" eaLnBrk="1" latinLnBrk="0" hangingPunct="1">
+      <a:defRPr sz="1200" kern="1200">
+        <a:solidFill>
+          <a:schemeClr val="tx1"/>
+        </a:solidFill>
+        <a:latin typeface="+mn-lt"/>
+        <a:ea typeface="+mn-ea"/>
+        <a:cs typeface="+mn-cs"/>
+      </a:defRPr>
+    </a:lvl9pPr>
+  </p:notesStyle>
+</p:notesMaster>
+</file>
+
+<file path=ppt/notesSlides/notesSlide1.xml><?xml version="1.0" encoding="utf-8"?>
+<p:notes xmlns:a="http://schemas.openxmlformats.org/drawingml/2006/main" xmlns:r="http://schemas.openxmlformats.org/officeDocument/2006/relationships" xmlns:p="http://schemas.openxmlformats.org/presentationml/2006/main">
+  <p:cSld>
+    <p:spTree>
+      <p:nvGrpSpPr>
+        <p:cNvPr id="1" name=""/>
+        <p:cNvGrpSpPr/>
+        <p:nvPr/>
+      </p:nvGrpSpPr>
+      <p:grpSpPr>
+        <a:xfrm>
+          <a:off x="0" y="0"/>
+          <a:ext cx="0" cy="0"/>
+          <a:chOff x="0" y="0"/>
+          <a:chExt cx="0" cy="0"/>
+        </a:xfrm>
+      </p:grpSpPr>
+      <p:sp>
+        <p:nvSpPr>
+          <p:cNvPr id="2" name="Slide Image Placeholder 1"/>
+          <p:cNvSpPr>
+            <a:spLocks noGrp="1" noRot="1" noChangeAspect="1"/>
+          </p:cNvSpPr>
+          <p:nvPr>
+            <p:ph type="sldImg"/>
+          </p:nvPr>
+        </p:nvSpPr>
+        <p:spPr/>
+      </p:sp>
+      <p:sp>
+        <p:nvSpPr>
+          <p:cNvPr id="3" name="Notes Placeholder 2"/>
+          <p:cNvSpPr>
+            <a:spLocks noGrp="1"/>
+          </p:cNvSpPr>
+          <p:nvPr>
+            <p:ph type="body" idx="1"/>
+          </p:nvPr>
+        </p:nvSpPr>
+        <p:spPr/>
+        <p:txBody>
+          <a:bodyPr/>
+          <a:lstStyle/>
+          <a:p>
+            <a:r>
+              <a:rPr lang="en-GB" dirty="0"/>
+              <a:t>W</a:t>
+            </a:r>
+            <a:r>
+              <a:rPr lang="en-CZ" dirty="0"/>
+              <a:t>here the learned graph S </a:t>
+            </a:r>
+            <a:r>
+              <a:rPr lang="en-GB" dirty="0"/>
+              <a:t>is regularized to be smooth and sparse</a:t>
+            </a:r>
+            <a:endParaRPr lang="en-CZ" dirty="0"/>
+          </a:p>
+        </p:txBody>
+      </p:sp>
+      <p:sp>
+        <p:nvSpPr>
+          <p:cNvPr id="4" name="Slide Number Placeholder 3"/>
+          <p:cNvSpPr>
+            <a:spLocks noGrp="1"/>
+          </p:cNvSpPr>
+          <p:nvPr>
+            <p:ph type="sldNum" sz="quarter" idx="5"/>
+          </p:nvPr>
+        </p:nvSpPr>
+        <p:spPr/>
+        <p:txBody>
+          <a:bodyPr/>
+          <a:lstStyle/>
+          <a:p>
+            <a:fld id="{D6A71191-B569-1341-A34F-AEBAB377C1A0}" type="slidenum">
+              <a:rPr lang="en-CZ" smtClean="0"/>
+              <a:t>8</a:t>
+            </a:fld>
+            <a:endParaRPr lang="en-CZ"/>
+          </a:p>
+        </p:txBody>
+      </p:sp>
+    </p:spTree>
+    <p:extLst>
+      <p:ext uri="{BB962C8B-B14F-4D97-AF65-F5344CB8AC3E}">
+        <p14:creationId xmlns:p14="http://schemas.microsoft.com/office/powerpoint/2010/main" val="2279559969"/>
+      </p:ext>
+    </p:extLst>
+  </p:cSld>
+  <p:clrMapOvr>
+    <a:masterClrMapping/>
+  </p:clrMapOvr>
+</p:notes>
+</file>
+
+<file path=ppt/notesSlides/notesSlide2.xml><?xml version="1.0" encoding="utf-8"?>
+<p:notes xmlns:a="http://schemas.openxmlformats.org/drawingml/2006/main" xmlns:r="http://schemas.openxmlformats.org/officeDocument/2006/relationships" xmlns:p="http://schemas.openxmlformats.org/presentationml/2006/main">
+  <p:cSld>
+    <p:spTree>
+      <p:nvGrpSpPr>
+        <p:cNvPr id="1" name=""/>
+        <p:cNvGrpSpPr/>
+        <p:nvPr/>
+      </p:nvGrpSpPr>
+      <p:grpSpPr>
+        <a:xfrm>
+          <a:off x="0" y="0"/>
+          <a:ext cx="0" cy="0"/>
+          <a:chOff x="0" y="0"/>
+          <a:chExt cx="0" cy="0"/>
+        </a:xfrm>
+      </p:grpSpPr>
+      <p:sp>
+        <p:nvSpPr>
+          <p:cNvPr id="2" name="Slide Image Placeholder 1"/>
+          <p:cNvSpPr>
+            <a:spLocks noGrp="1" noRot="1" noChangeAspect="1"/>
+          </p:cNvSpPr>
+          <p:nvPr>
+            <p:ph type="sldImg"/>
+          </p:nvPr>
+        </p:nvSpPr>
+        <p:spPr/>
+      </p:sp>
+      <p:sp>
+        <p:nvSpPr>
+          <p:cNvPr id="3" name="Notes Placeholder 2"/>
+          <p:cNvSpPr>
+            <a:spLocks noGrp="1"/>
+          </p:cNvSpPr>
+          <p:nvPr>
+            <p:ph type="body" idx="1"/>
+          </p:nvPr>
+        </p:nvSpPr>
+        <p:spPr/>
+        <p:txBody>
+          <a:bodyPr/>
+          <a:lstStyle/>
+          <a:p>
+            <a:r>
+              <a:rPr lang="en-GB" dirty="0"/>
+              <a:t>M</a:t>
+            </a:r>
+            <a:r>
+              <a:rPr lang="en-CZ" dirty="0"/>
+              <a:t>ogonet june 2021, Li and Nabavi january 2024</a:t>
+            </a:r>
+          </a:p>
+        </p:txBody>
+      </p:sp>
+      <p:sp>
+        <p:nvSpPr>
+          <p:cNvPr id="4" name="Slide Number Placeholder 3"/>
+          <p:cNvSpPr>
+            <a:spLocks noGrp="1"/>
+          </p:cNvSpPr>
+          <p:nvPr>
+            <p:ph type="sldNum" sz="quarter" idx="5"/>
+          </p:nvPr>
+        </p:nvSpPr>
+        <p:spPr/>
+        <p:txBody>
+          <a:bodyPr/>
+          <a:lstStyle/>
+          <a:p>
+            <a:fld id="{D6A71191-B569-1341-A34F-AEBAB377C1A0}" type="slidenum">
+              <a:rPr lang="en-CZ" smtClean="0"/>
+              <a:t>13</a:t>
+            </a:fld>
+            <a:endParaRPr lang="en-CZ"/>
+          </a:p>
+        </p:txBody>
+      </p:sp>
+    </p:spTree>
+    <p:extLst>
+      <p:ext uri="{BB962C8B-B14F-4D97-AF65-F5344CB8AC3E}">
+        <p14:creationId xmlns:p14="http://schemas.microsoft.com/office/powerpoint/2010/main" val="504055447"/>
+      </p:ext>
+    </p:extLst>
+  </p:cSld>
+  <p:clrMapOvr>
+    <a:masterClrMapping/>
+  </p:clrMapOvr>
+</p:notes>
 </file>
 
 <file path=ppt/slideLayouts/slideLayout1.xml><?xml version="1.0" encoding="utf-8"?>
@@ -1535,7 +2076,7 @@
           <p:cNvPr id="2" name="Title 1">
             <a:extLst>
               <a:ext uri="{FF2B5EF4-FFF2-40B4-BE49-F238E27FC236}">
-                <a16:creationId xmlns:a16="http://schemas.microsoft.com/office/drawing/2014/main" id="{DCA3192F-B3B7-3034-C1BF-0E8D30BD23DA}"/>
+                <a16:creationId xmlns:a16="http://schemas.microsoft.com/office/drawing/2014/main" id="{7C9002A7-55E9-34CD-C6C3-B99F3B47DD7E}"/>
               </a:ext>
             </a:extLst>
           </p:cNvPr>
@@ -1553,7 +2094,7 @@
           <a:p>
             <a:r>
               <a:rPr lang="en-CZ" dirty="0"/>
-              <a:t>MPK-GNN</a:t>
+              <a:t>Feature interactions</a:t>
             </a:r>
           </a:p>
         </p:txBody>
@@ -1563,7 +2104,7 @@
           <p:cNvPr id="3" name="Content Placeholder 2">
             <a:extLst>
               <a:ext uri="{FF2B5EF4-FFF2-40B4-BE49-F238E27FC236}">
-                <a16:creationId xmlns:a16="http://schemas.microsoft.com/office/drawing/2014/main" id="{09C3EAB7-A7C6-57E8-1CB3-339DF47B8EFC}"/>
+                <a16:creationId xmlns:a16="http://schemas.microsoft.com/office/drawing/2014/main" id="{C398D06C-48B0-B30A-866C-061334B0A480}"/>
               </a:ext>
             </a:extLst>
           </p:cNvPr>
@@ -1576,17 +2117,64 @@
         </p:nvSpPr>
         <p:spPr/>
         <p:txBody>
-          <a:bodyPr/>
+          <a:bodyPr>
+            <a:normAutofit/>
+          </a:bodyPr>
           <a:lstStyle/>
           <a:p>
-            <a:endParaRPr lang="en-CZ"/>
+            <a:r>
+              <a:rPr lang="en-CZ" sz="2800" dirty="0"/>
+              <a:t>- gene - gene interactions</a:t>
+            </a:r>
+          </a:p>
+          <a:p>
+            <a:r>
+              <a:rPr lang="en-CZ" sz="2800" dirty="0"/>
+              <a:t>- protein - protein interactions</a:t>
+            </a:r>
+          </a:p>
+          <a:p>
+            <a:r>
+              <a:rPr lang="en-CZ" sz="2800" dirty="0"/>
+              <a:t>- miRNA - gene interactions</a:t>
+            </a:r>
           </a:p>
         </p:txBody>
       </p:sp>
+      <p:pic>
+        <p:nvPicPr>
+          <p:cNvPr id="4" name="Picture 3">
+            <a:extLst>
+              <a:ext uri="{FF2B5EF4-FFF2-40B4-BE49-F238E27FC236}">
+                <a16:creationId xmlns:a16="http://schemas.microsoft.com/office/drawing/2014/main" id="{74FDF85B-1978-9F93-8BB4-E52F9B23063F}"/>
+              </a:ext>
+            </a:extLst>
+          </p:cNvPr>
+          <p:cNvPicPr>
+            <a:picLocks noChangeAspect="1"/>
+          </p:cNvPicPr>
+          <p:nvPr/>
+        </p:nvPicPr>
+        <p:blipFill>
+          <a:blip r:embed="rId2"/>
+          <a:stretch>
+            <a:fillRect/>
+          </a:stretch>
+        </p:blipFill>
+        <p:spPr>
+          <a:xfrm>
+            <a:off x="5970843" y="816966"/>
+            <a:ext cx="5861157" cy="5770800"/>
+          </a:xfrm>
+          <a:prstGeom prst="rect">
+            <a:avLst/>
+          </a:prstGeom>
+        </p:spPr>
+      </p:pic>
     </p:spTree>
     <p:extLst>
       <p:ext uri="{BB962C8B-B14F-4D97-AF65-F5344CB8AC3E}">
-        <p14:creationId xmlns:p14="http://schemas.microsoft.com/office/powerpoint/2010/main" val="3719765060"/>
+        <p14:creationId xmlns:p14="http://schemas.microsoft.com/office/powerpoint/2010/main" val="3947280238"/>
       </p:ext>
     </p:extLst>
   </p:cSld>
@@ -1618,7 +2206,7 @@
           <p:cNvPr id="2" name="Title 1">
             <a:extLst>
               <a:ext uri="{FF2B5EF4-FFF2-40B4-BE49-F238E27FC236}">
-                <a16:creationId xmlns:a16="http://schemas.microsoft.com/office/drawing/2014/main" id="{78ACEA6B-AF56-568A-31D3-463C38BEF49F}"/>
+                <a16:creationId xmlns:a16="http://schemas.microsoft.com/office/drawing/2014/main" id="{DCA3192F-B3B7-3034-C1BF-0E8D30BD23DA}"/>
               </a:ext>
             </a:extLst>
           </p:cNvPr>
@@ -1629,44 +2217,76 @@
             <p:ph type="title"/>
           </p:nvPr>
         </p:nvSpPr>
-        <p:spPr/>
+        <p:spPr>
+          <a:xfrm>
+            <a:off x="1440000" y="1259673"/>
+            <a:ext cx="10392000" cy="1087934"/>
+          </a:xfrm>
+        </p:spPr>
         <p:txBody>
           <a:bodyPr/>
           <a:lstStyle/>
           <a:p>
-            <a:endParaRPr lang="en-CZ"/>
+            <a:r>
+              <a:rPr lang="en-CZ" dirty="0"/>
+              <a:t>MPK-GNN</a:t>
+            </a:r>
           </a:p>
         </p:txBody>
       </p:sp>
-      <p:sp>
-        <p:nvSpPr>
-          <p:cNvPr id="3" name="Content Placeholder 2">
+      <p:pic>
+        <p:nvPicPr>
+          <p:cNvPr id="4098" name="Picture 2">
             <a:extLst>
               <a:ext uri="{FF2B5EF4-FFF2-40B4-BE49-F238E27FC236}">
-                <a16:creationId xmlns:a16="http://schemas.microsoft.com/office/drawing/2014/main" id="{C8DC6A8F-E852-2626-2896-18CD1558D11C}"/>
+                <a16:creationId xmlns:a16="http://schemas.microsoft.com/office/drawing/2014/main" id="{2A0532C8-DFB4-A79B-C55D-4FBF60E0B1F7}"/>
               </a:ext>
             </a:extLst>
           </p:cNvPr>
-          <p:cNvSpPr>
-            <a:spLocks noGrp="1"/>
-          </p:cNvSpPr>
+          <p:cNvPicPr>
+            <a:picLocks noGrp="1" noChangeAspect="1" noChangeArrowheads="1"/>
+          </p:cNvPicPr>
           <p:nvPr>
             <p:ph idx="1"/>
           </p:nvPr>
-        </p:nvSpPr>
-        <p:spPr/>
-        <p:txBody>
-          <a:bodyPr/>
-          <a:lstStyle/>
-          <a:p>
-            <a:endParaRPr lang="en-CZ"/>
-          </a:p>
-        </p:txBody>
-      </p:sp>
+        </p:nvPicPr>
+        <p:blipFill>
+          <a:blip r:embed="rId2">
+            <a:extLst>
+              <a:ext uri="{28A0092B-C50C-407E-A947-70E740481C1C}">
+                <a14:useLocalDpi xmlns:a14="http://schemas.microsoft.com/office/drawing/2010/main" val="0"/>
+              </a:ext>
+            </a:extLst>
+          </a:blip>
+          <a:srcRect/>
+          <a:stretch>
+            <a:fillRect/>
+          </a:stretch>
+        </p:blipFill>
+        <p:spPr bwMode="auto">
+          <a:xfrm>
+            <a:off x="1756078" y="2022763"/>
+            <a:ext cx="8995922" cy="3872635"/>
+          </a:xfrm>
+          <a:prstGeom prst="rect">
+            <a:avLst/>
+          </a:prstGeom>
+          <a:noFill/>
+          <a:extLst>
+            <a:ext uri="{909E8E84-426E-40DD-AFC4-6F175D3DCCD1}">
+              <a14:hiddenFill xmlns:a14="http://schemas.microsoft.com/office/drawing/2010/main">
+                <a:solidFill>
+                  <a:srgbClr val="FFFFFF"/>
+                </a:solidFill>
+              </a14:hiddenFill>
+            </a:ext>
+          </a:extLst>
+        </p:spPr>
+      </p:pic>
     </p:spTree>
     <p:extLst>
       <p:ext uri="{BB962C8B-B14F-4D97-AF65-F5344CB8AC3E}">
-        <p14:creationId xmlns:p14="http://schemas.microsoft.com/office/powerpoint/2010/main" val="1011778261"/>
+        <p14:creationId xmlns:p14="http://schemas.microsoft.com/office/powerpoint/2010/main" val="3719765060"/>
       </p:ext>
     </p:extLst>
   </p:cSld>
@@ -1695,10 +2315,10 @@
       </p:grpSpPr>
       <p:sp>
         <p:nvSpPr>
-          <p:cNvPr id="2" name="Title 1">
+          <p:cNvPr id="5127" name="Title 1">
             <a:extLst>
               <a:ext uri="{FF2B5EF4-FFF2-40B4-BE49-F238E27FC236}">
-                <a16:creationId xmlns:a16="http://schemas.microsoft.com/office/drawing/2014/main" id="{6729DB31-FEB6-B58B-9B33-43B8EA084451}"/>
+                <a16:creationId xmlns:a16="http://schemas.microsoft.com/office/drawing/2014/main" id="{7FDFDE15-8089-3BE2-2E76-29D5586C8058}"/>
               </a:ext>
             </a:extLst>
           </p:cNvPr>
@@ -1709,47 +2329,92 @@
             <p:ph type="title"/>
           </p:nvPr>
         </p:nvSpPr>
-        <p:spPr/>
+        <p:spPr>
+          <a:xfrm>
+            <a:off x="1440000" y="1800000"/>
+            <a:ext cx="10392000" cy="1087934"/>
+          </a:xfrm>
+        </p:spPr>
         <p:txBody>
           <a:bodyPr/>
           <a:lstStyle/>
           <a:p>
             <a:r>
-              <a:rPr lang="en-CZ" dirty="0"/>
-              <a:t>What is next</a:t>
-            </a:r>
+              <a:rPr lang="en-US" dirty="0"/>
+              <a:t>Li and </a:t>
+            </a:r>
+            <a:r>
+              <a:rPr lang="en-US" dirty="0" err="1"/>
+              <a:t>Nabavi</a:t>
+            </a:r>
+            <a:endParaRPr lang="en-US" dirty="0"/>
           </a:p>
         </p:txBody>
       </p:sp>
-      <p:sp>
-        <p:nvSpPr>
-          <p:cNvPr id="3" name="Content Placeholder 2">
+      <p:pic>
+        <p:nvPicPr>
+          <p:cNvPr id="2" name="Picture 1">
             <a:extLst>
               <a:ext uri="{FF2B5EF4-FFF2-40B4-BE49-F238E27FC236}">
-                <a16:creationId xmlns:a16="http://schemas.microsoft.com/office/drawing/2014/main" id="{A18D09B3-5DF3-4B19-082E-D485A660AE6E}"/>
+                <a16:creationId xmlns:a16="http://schemas.microsoft.com/office/drawing/2014/main" id="{1D8E37B5-5026-2DEF-21CA-0270FF17E7BE}"/>
               </a:ext>
             </a:extLst>
           </p:cNvPr>
-          <p:cNvSpPr>
-            <a:spLocks noGrp="1"/>
-          </p:cNvSpPr>
-          <p:nvPr>
-            <p:ph idx="1"/>
-          </p:nvPr>
-        </p:nvSpPr>
-        <p:spPr/>
-        <p:txBody>
-          <a:bodyPr/>
-          <a:lstStyle/>
-          <a:p>
-            <a:endParaRPr lang="en-CZ"/>
-          </a:p>
-        </p:txBody>
-      </p:sp>
+          <p:cNvPicPr>
+            <a:picLocks noChangeAspect="1"/>
+          </p:cNvPicPr>
+          <p:nvPr/>
+        </p:nvPicPr>
+        <p:blipFill>
+          <a:blip r:embed="rId2"/>
+          <a:stretch>
+            <a:fillRect/>
+          </a:stretch>
+        </p:blipFill>
+        <p:spPr>
+          <a:xfrm>
+            <a:off x="6247698" y="0"/>
+            <a:ext cx="5094514" cy="6858000"/>
+          </a:xfrm>
+          <a:prstGeom prst="rect">
+            <a:avLst/>
+          </a:prstGeom>
+        </p:spPr>
+      </p:pic>
+      <p:pic>
+        <p:nvPicPr>
+          <p:cNvPr id="5" name="Picture 4">
+            <a:extLst>
+              <a:ext uri="{FF2B5EF4-FFF2-40B4-BE49-F238E27FC236}">
+                <a16:creationId xmlns:a16="http://schemas.microsoft.com/office/drawing/2014/main" id="{7BBA5A9A-E051-883F-B068-96B608422118}"/>
+              </a:ext>
+            </a:extLst>
+          </p:cNvPr>
+          <p:cNvPicPr>
+            <a:picLocks noChangeAspect="1"/>
+          </p:cNvPicPr>
+          <p:nvPr/>
+        </p:nvPicPr>
+        <p:blipFill>
+          <a:blip r:embed="rId3"/>
+          <a:stretch>
+            <a:fillRect/>
+          </a:stretch>
+        </p:blipFill>
+        <p:spPr>
+          <a:xfrm>
+            <a:off x="849788" y="3059766"/>
+            <a:ext cx="5259556" cy="3093856"/>
+          </a:xfrm>
+          <a:prstGeom prst="rect">
+            <a:avLst/>
+          </a:prstGeom>
+        </p:spPr>
+      </p:pic>
     </p:spTree>
     <p:extLst>
       <p:ext uri="{BB962C8B-B14F-4D97-AF65-F5344CB8AC3E}">
-        <p14:creationId xmlns:p14="http://schemas.microsoft.com/office/powerpoint/2010/main" val="4288924511"/>
+        <p14:creationId xmlns:p14="http://schemas.microsoft.com/office/powerpoint/2010/main" val="978671829"/>
       </p:ext>
     </p:extLst>
   </p:cSld>
@@ -1781,7 +2446,7 @@
           <p:cNvPr id="2" name="Title 1">
             <a:extLst>
               <a:ext uri="{FF2B5EF4-FFF2-40B4-BE49-F238E27FC236}">
-                <a16:creationId xmlns:a16="http://schemas.microsoft.com/office/drawing/2014/main" id="{53C31027-7EBB-BF2E-9677-AE201C8528FE}"/>
+                <a16:creationId xmlns:a16="http://schemas.microsoft.com/office/drawing/2014/main" id="{3AF9E223-DA32-AF7F-3FC1-0EABC02BE735}"/>
               </a:ext>
             </a:extLst>
           </p:cNvPr>
@@ -1789,30 +2454,57 @@
             <a:spLocks noGrp="1"/>
           </p:cNvSpPr>
           <p:nvPr>
-            <p:ph type="ctrTitle"/>
+            <p:ph type="title"/>
           </p:nvPr>
         </p:nvSpPr>
-        <p:spPr>
-          <a:xfrm>
-            <a:off x="1399658" y="2705668"/>
-            <a:ext cx="10315592" cy="1446663"/>
-          </a:xfrm>
-        </p:spPr>
+        <p:spPr/>
         <p:txBody>
           <a:bodyPr/>
           <a:lstStyle/>
           <a:p>
             <a:r>
               <a:rPr lang="en-CZ" dirty="0"/>
-              <a:t>Thank you for your attention.</a:t>
+              <a:t>Performance comparision on BRCA dataset</a:t>
             </a:r>
           </a:p>
         </p:txBody>
       </p:sp>
+      <p:pic>
+        <p:nvPicPr>
+          <p:cNvPr id="4" name="Content Placeholder 3">
+            <a:extLst>
+              <a:ext uri="{FF2B5EF4-FFF2-40B4-BE49-F238E27FC236}">
+                <a16:creationId xmlns:a16="http://schemas.microsoft.com/office/drawing/2014/main" id="{B2785252-5D36-D723-A5C0-7809903F4995}"/>
+              </a:ext>
+            </a:extLst>
+          </p:cNvPr>
+          <p:cNvPicPr>
+            <a:picLocks noGrp="1" noChangeAspect="1"/>
+          </p:cNvPicPr>
+          <p:nvPr>
+            <p:ph idx="1"/>
+          </p:nvPr>
+        </p:nvPicPr>
+        <p:blipFill>
+          <a:blip r:embed="rId3"/>
+          <a:stretch>
+            <a:fillRect/>
+          </a:stretch>
+        </p:blipFill>
+        <p:spPr>
+          <a:xfrm>
+            <a:off x="2182761" y="2343967"/>
+            <a:ext cx="8111203" cy="4068726"/>
+          </a:xfrm>
+          <a:prstGeom prst="rect">
+            <a:avLst/>
+          </a:prstGeom>
+        </p:spPr>
+      </p:pic>
     </p:spTree>
     <p:extLst>
       <p:ext uri="{BB962C8B-B14F-4D97-AF65-F5344CB8AC3E}">
-        <p14:creationId xmlns:p14="http://schemas.microsoft.com/office/powerpoint/2010/main" val="2818648647"/>
+        <p14:creationId xmlns:p14="http://schemas.microsoft.com/office/powerpoint/2010/main" val="1844178036"/>
       </p:ext>
     </p:extLst>
   </p:cSld>
@@ -1844,7 +2536,7 @@
           <p:cNvPr id="2" name="Title 1">
             <a:extLst>
               <a:ext uri="{FF2B5EF4-FFF2-40B4-BE49-F238E27FC236}">
-                <a16:creationId xmlns:a16="http://schemas.microsoft.com/office/drawing/2014/main" id="{EB813861-821E-F101-4B0D-DA647DB4C991}"/>
+                <a16:creationId xmlns:a16="http://schemas.microsoft.com/office/drawing/2014/main" id="{6729DB31-FEB6-B58B-9B33-43B8EA084451}"/>
               </a:ext>
             </a:extLst>
           </p:cNvPr>
@@ -1862,7 +2554,7 @@
           <a:p>
             <a:r>
               <a:rPr lang="en-CZ" dirty="0"/>
-              <a:t>Sources</a:t>
+              <a:t>What is next</a:t>
             </a:r>
           </a:p>
         </p:txBody>
@@ -1872,7 +2564,7 @@
           <p:cNvPr id="3" name="Content Placeholder 2">
             <a:extLst>
               <a:ext uri="{FF2B5EF4-FFF2-40B4-BE49-F238E27FC236}">
-                <a16:creationId xmlns:a16="http://schemas.microsoft.com/office/drawing/2014/main" id="{57A170E5-B4D5-6080-9922-80E42B813D83}"/>
+                <a16:creationId xmlns:a16="http://schemas.microsoft.com/office/drawing/2014/main" id="{A18D09B3-5DF3-4B19-082E-D485A660AE6E}"/>
               </a:ext>
             </a:extLst>
           </p:cNvPr>
@@ -1888,6 +2580,24 @@
           <a:bodyPr/>
           <a:lstStyle/>
           <a:p>
+            <a:r>
+              <a:rPr lang="en-CZ" sz="2800" dirty="0"/>
+              <a:t>- Expand the review, go into detail and find which methods work and which do not</a:t>
+            </a:r>
+          </a:p>
+          <a:p>
+            <a:r>
+              <a:rPr lang="en-CZ" sz="2800" dirty="0"/>
+              <a:t>- Provide a validation across several datasets for all the methods</a:t>
+            </a:r>
+          </a:p>
+          <a:p>
+            <a:r>
+              <a:rPr lang="en-CZ" sz="2800" dirty="0"/>
+              <a:t>- Utilize ideas from different methods and come up with one what will work better and find new biomarkers</a:t>
+            </a:r>
+          </a:p>
+          <a:p>
             <a:endParaRPr lang="en-CZ" dirty="0"/>
           </a:p>
         </p:txBody>
@@ -1895,7 +2605,235 @@
     </p:spTree>
     <p:extLst>
       <p:ext uri="{BB962C8B-B14F-4D97-AF65-F5344CB8AC3E}">
-        <p14:creationId xmlns:p14="http://schemas.microsoft.com/office/powerpoint/2010/main" val="1039166872"/>
+        <p14:creationId xmlns:p14="http://schemas.microsoft.com/office/powerpoint/2010/main" val="4288924511"/>
+      </p:ext>
+    </p:extLst>
+  </p:cSld>
+  <p:clrMapOvr>
+    <a:masterClrMapping/>
+  </p:clrMapOvr>
+</p:sld>
+</file>
+
+<file path=ppt/slides/slide15.xml><?xml version="1.0" encoding="utf-8"?>
+<p:sld xmlns:a="http://schemas.openxmlformats.org/drawingml/2006/main" xmlns:r="http://schemas.openxmlformats.org/officeDocument/2006/relationships" xmlns:p="http://schemas.openxmlformats.org/presentationml/2006/main">
+  <p:cSld>
+    <p:spTree>
+      <p:nvGrpSpPr>
+        <p:cNvPr id="1" name=""/>
+        <p:cNvGrpSpPr/>
+        <p:nvPr/>
+      </p:nvGrpSpPr>
+      <p:grpSpPr>
+        <a:xfrm>
+          <a:off x="0" y="0"/>
+          <a:ext cx="0" cy="0"/>
+          <a:chOff x="0" y="0"/>
+          <a:chExt cx="0" cy="0"/>
+        </a:xfrm>
+      </p:grpSpPr>
+      <mc:AlternateContent xmlns:mc="http://schemas.openxmlformats.org/markup-compatibility/2006" xmlns:a14="http://schemas.microsoft.com/office/drawing/2010/main">
+        <mc:Choice Requires="a14">
+          <p:sp>
+            <p:nvSpPr>
+              <p:cNvPr id="2" name="Title 1">
+                <a:extLst>
+                  <a:ext uri="{FF2B5EF4-FFF2-40B4-BE49-F238E27FC236}">
+                    <a16:creationId xmlns:a16="http://schemas.microsoft.com/office/drawing/2014/main" id="{53C31027-7EBB-BF2E-9677-AE201C8528FE}"/>
+                  </a:ext>
+                </a:extLst>
+              </p:cNvPr>
+              <p:cNvSpPr>
+                <a:spLocks noGrp="1"/>
+              </p:cNvSpPr>
+              <p:nvPr>
+                <p:ph type="ctrTitle"/>
+              </p:nvPr>
+            </p:nvSpPr>
+            <p:spPr>
+              <a:xfrm>
+                <a:off x="1399658" y="2705668"/>
+                <a:ext cx="10315592" cy="1446663"/>
+              </a:xfrm>
+            </p:spPr>
+            <p:txBody>
+              <a:bodyPr>
+                <a:normAutofit/>
+              </a:bodyPr>
+              <a:lstStyle/>
+              <a:p>
+                <a:r>
+                  <a:rPr lang="en-CZ" dirty="0"/>
+                  <a:t>Thank you for your </a:t>
+                </a:r>
+                <a14:m>
+                  <m:oMath xmlns:m="http://schemas.openxmlformats.org/officeDocument/2006/math">
+                    <m:r>
+                      <a:rPr lang="en-US" b="1" i="1" smtClean="0">
+                        <a:latin typeface="Cambria Math" panose="02040503050406030204" pitchFamily="18" charset="0"/>
+                      </a:rPr>
+                      <m:t>𝒔𝒐𝒇𝒕𝒎𝒂𝒙</m:t>
+                    </m:r>
+                    <m:d>
+                      <m:dPr>
+                        <m:ctrlPr>
+                          <a:rPr lang="en-US" b="1" i="1" smtClean="0">
+                            <a:latin typeface="Cambria Math" panose="02040503050406030204" pitchFamily="18" charset="0"/>
+                          </a:rPr>
+                        </m:ctrlPr>
+                      </m:dPr>
+                      <m:e>
+                        <m:f>
+                          <m:fPr>
+                            <m:ctrlPr>
+                              <a:rPr lang="en-US" b="1" i="1" smtClean="0">
+                                <a:latin typeface="Cambria Math" panose="02040503050406030204" pitchFamily="18" charset="0"/>
+                              </a:rPr>
+                            </m:ctrlPr>
+                          </m:fPr>
+                          <m:num>
+                            <m:r>
+                              <a:rPr lang="en-US" b="1" i="1" smtClean="0">
+                                <a:latin typeface="Cambria Math" panose="02040503050406030204" pitchFamily="18" charset="0"/>
+                              </a:rPr>
+                              <m:t>𝑸</m:t>
+                            </m:r>
+                            <m:sSup>
+                              <m:sSupPr>
+                                <m:ctrlPr>
+                                  <a:rPr lang="en-US" b="1" i="1" smtClean="0">
+                                    <a:latin typeface="Cambria Math" panose="02040503050406030204" pitchFamily="18" charset="0"/>
+                                  </a:rPr>
+                                </m:ctrlPr>
+                              </m:sSupPr>
+                              <m:e>
+                                <m:r>
+                                  <a:rPr lang="en-US" b="1" i="1" smtClean="0">
+                                    <a:latin typeface="Cambria Math" panose="02040503050406030204" pitchFamily="18" charset="0"/>
+                                  </a:rPr>
+                                  <m:t>𝑲</m:t>
+                                </m:r>
+                              </m:e>
+                              <m:sup>
+                                <m:r>
+                                  <a:rPr lang="en-US" b="1" i="1" smtClean="0">
+                                    <a:latin typeface="Cambria Math" panose="02040503050406030204" pitchFamily="18" charset="0"/>
+                                  </a:rPr>
+                                  <m:t>𝑻</m:t>
+                                </m:r>
+                              </m:sup>
+                            </m:sSup>
+                          </m:num>
+                          <m:den>
+                            <m:rad>
+                              <m:radPr>
+                                <m:degHide m:val="on"/>
+                                <m:ctrlPr>
+                                  <a:rPr lang="en-US" b="1" i="1" smtClean="0">
+                                    <a:latin typeface="Cambria Math" panose="02040503050406030204" pitchFamily="18" charset="0"/>
+                                  </a:rPr>
+                                </m:ctrlPr>
+                              </m:radPr>
+                              <m:deg/>
+                              <m:e>
+                                <m:sSub>
+                                  <m:sSubPr>
+                                    <m:ctrlPr>
+                                      <a:rPr lang="en-US" b="1" i="1" smtClean="0">
+                                        <a:latin typeface="Cambria Math" panose="02040503050406030204" pitchFamily="18" charset="0"/>
+                                      </a:rPr>
+                                    </m:ctrlPr>
+                                  </m:sSubPr>
+                                  <m:e>
+                                    <m:r>
+                                      <a:rPr lang="en-US" b="1" i="1" smtClean="0">
+                                        <a:latin typeface="Cambria Math" panose="02040503050406030204" pitchFamily="18" charset="0"/>
+                                      </a:rPr>
+                                      <m:t>𝒅</m:t>
+                                    </m:r>
+                                  </m:e>
+                                  <m:sub>
+                                    <m:r>
+                                      <a:rPr lang="en-US" b="1" i="1" smtClean="0">
+                                        <a:latin typeface="Cambria Math" panose="02040503050406030204" pitchFamily="18" charset="0"/>
+                                      </a:rPr>
+                                      <m:t>𝒌</m:t>
+                                    </m:r>
+                                  </m:sub>
+                                </m:sSub>
+                              </m:e>
+                            </m:rad>
+                          </m:den>
+                        </m:f>
+                      </m:e>
+                    </m:d>
+                    <m:r>
+                      <a:rPr lang="en-US" b="1" i="1" smtClean="0">
+                        <a:latin typeface="Cambria Math" panose="02040503050406030204" pitchFamily="18" charset="0"/>
+                      </a:rPr>
+                      <m:t>⋅</m:t>
+                    </m:r>
+                    <m:r>
+                      <a:rPr lang="en-US" b="1" i="1" smtClean="0">
+                        <a:latin typeface="Cambria Math" panose="02040503050406030204" pitchFamily="18" charset="0"/>
+                      </a:rPr>
+                      <m:t>𝑽</m:t>
+                    </m:r>
+                  </m:oMath>
+                </a14:m>
+                <a:endParaRPr lang="en-CZ" dirty="0"/>
+              </a:p>
+            </p:txBody>
+          </p:sp>
+        </mc:Choice>
+        <mc:Fallback xmlns="">
+          <p:sp>
+            <p:nvSpPr>
+              <p:cNvPr id="2" name="Title 1">
+                <a:extLst>
+                  <a:ext uri="{FF2B5EF4-FFF2-40B4-BE49-F238E27FC236}">
+                    <a16:creationId xmlns:a16="http://schemas.microsoft.com/office/drawing/2014/main" id="{53C31027-7EBB-BF2E-9677-AE201C8528FE}"/>
+                  </a:ext>
+                </a:extLst>
+              </p:cNvPr>
+              <p:cNvSpPr>
+                <a:spLocks noGrp="1" noRot="1" noChangeAspect="1" noMove="1" noResize="1" noEditPoints="1" noAdjustHandles="1" noChangeArrowheads="1" noChangeShapeType="1" noTextEdit="1"/>
+              </p:cNvSpPr>
+              <p:nvPr>
+                <p:ph type="ctrTitle"/>
+              </p:nvPr>
+            </p:nvSpPr>
+            <p:spPr>
+              <a:xfrm>
+                <a:off x="1399658" y="2705668"/>
+                <a:ext cx="10315592" cy="1446663"/>
+              </a:xfrm>
+              <a:blipFill>
+                <a:blip r:embed="rId2"/>
+                <a:stretch>
+                  <a:fillRect l="-2706" t="-1754"/>
+                </a:stretch>
+              </a:blipFill>
+            </p:spPr>
+            <p:txBody>
+              <a:bodyPr/>
+              <a:lstStyle/>
+              <a:p>
+                <a:r>
+                  <a:rPr lang="en-CZ">
+                    <a:noFill/>
+                  </a:rPr>
+                  <a:t> </a:t>
+                </a:r>
+              </a:p>
+            </p:txBody>
+          </p:sp>
+        </mc:Fallback>
+      </mc:AlternateContent>
+    </p:spTree>
+    <p:extLst>
+      <p:ext uri="{BB962C8B-B14F-4D97-AF65-F5344CB8AC3E}">
+        <p14:creationId xmlns:p14="http://schemas.microsoft.com/office/powerpoint/2010/main" val="2818648647"/>
       </p:ext>
     </p:extLst>
   </p:cSld>
@@ -2223,6 +3161,12 @@
             <a:r>
               <a:rPr lang="en-CZ" sz="2800" dirty="0"/>
               <a:t>	- Lower grade glioma (LGG)</a:t>
+            </a:r>
+          </a:p>
+          <a:p>
+            <a:r>
+              <a:rPr lang="en-CZ" sz="2800" dirty="0"/>
+              <a:t>	- Alzheimer disease (ROSMAP)</a:t>
             </a:r>
           </a:p>
         </p:txBody>
@@ -2372,8 +3316,8 @@
           </a:p>
         </p:txBody>
       </p:sp>
-      <mc:AlternateContent xmlns:mc="http://schemas.openxmlformats.org/markup-compatibility/2006">
-        <mc:Choice xmlns:a14="http://schemas.microsoft.com/office/drawing/2010/main" Requires="a14">
+      <mc:AlternateContent xmlns:mc="http://schemas.openxmlformats.org/markup-compatibility/2006" xmlns:a14="http://schemas.microsoft.com/office/drawing/2010/main">
+        <mc:Choice Requires="a14">
           <p:sp>
             <p:nvSpPr>
               <p:cNvPr id="3" name="Content Placeholder 2">
@@ -2499,7 +3443,7 @@
             </p:txBody>
           </p:sp>
         </mc:Choice>
-        <mc:Fallback>
+        <mc:Fallback xmlns="">
           <p:sp>
             <p:nvSpPr>
               <p:cNvPr id="3" name="Content Placeholder 2">
@@ -2574,7 +3518,7 @@
           <p:cNvPr id="2" name="Title 1">
             <a:extLst>
               <a:ext uri="{FF2B5EF4-FFF2-40B4-BE49-F238E27FC236}">
-                <a16:creationId xmlns:a16="http://schemas.microsoft.com/office/drawing/2014/main" id="{3AF9E223-DA32-AF7F-3FC1-0EABC02BE735}"/>
+                <a16:creationId xmlns:a16="http://schemas.microsoft.com/office/drawing/2014/main" id="{F7551151-AA7B-6805-F2CE-559FB5079863}"/>
               </a:ext>
             </a:extLst>
           </p:cNvPr>
@@ -2585,47 +3529,76 @@
             <p:ph type="title"/>
           </p:nvPr>
         </p:nvSpPr>
-        <p:spPr/>
+        <p:spPr>
+          <a:xfrm>
+            <a:off x="1440000" y="1176545"/>
+            <a:ext cx="10392000" cy="1087934"/>
+          </a:xfrm>
+        </p:spPr>
         <p:txBody>
           <a:bodyPr/>
           <a:lstStyle/>
           <a:p>
             <a:r>
               <a:rPr lang="en-CZ" dirty="0"/>
-              <a:t>Baseline performance</a:t>
+              <a:t>Mogonet</a:t>
             </a:r>
           </a:p>
         </p:txBody>
       </p:sp>
-      <p:sp>
-        <p:nvSpPr>
-          <p:cNvPr id="3" name="Content Placeholder 2">
+      <p:pic>
+        <p:nvPicPr>
+          <p:cNvPr id="1026" name="Picture 2" descr="Fig. 1">
             <a:extLst>
               <a:ext uri="{FF2B5EF4-FFF2-40B4-BE49-F238E27FC236}">
-                <a16:creationId xmlns:a16="http://schemas.microsoft.com/office/drawing/2014/main" id="{92C5E341-2001-EC68-A8D0-E4FC871FB07A}"/>
+                <a16:creationId xmlns:a16="http://schemas.microsoft.com/office/drawing/2014/main" id="{E51EB2ED-CA1D-3D4A-E803-BD06EC4FA347}"/>
               </a:ext>
             </a:extLst>
           </p:cNvPr>
-          <p:cNvSpPr>
-            <a:spLocks noGrp="1"/>
-          </p:cNvSpPr>
+          <p:cNvPicPr>
+            <a:picLocks noGrp="1" noChangeAspect="1" noChangeArrowheads="1"/>
+          </p:cNvPicPr>
           <p:nvPr>
             <p:ph idx="1"/>
           </p:nvPr>
-        </p:nvSpPr>
-        <p:spPr/>
-        <p:txBody>
-          <a:bodyPr/>
-          <a:lstStyle/>
-          <a:p>
-            <a:endParaRPr lang="en-CZ"/>
-          </a:p>
-        </p:txBody>
-      </p:sp>
+        </p:nvPicPr>
+        <p:blipFill>
+          <a:blip r:embed="rId2">
+            <a:extLst>
+              <a:ext uri="{28A0092B-C50C-407E-A947-70E740481C1C}">
+                <a14:useLocalDpi xmlns:a14="http://schemas.microsoft.com/office/drawing/2010/main" val="0"/>
+              </a:ext>
+            </a:extLst>
+          </a:blip>
+          <a:srcRect/>
+          <a:stretch>
+            <a:fillRect/>
+          </a:stretch>
+        </p:blipFill>
+        <p:spPr bwMode="auto">
+          <a:xfrm>
+            <a:off x="955091" y="1720512"/>
+            <a:ext cx="10552606" cy="4453200"/>
+          </a:xfrm>
+          <a:prstGeom prst="rect">
+            <a:avLst/>
+          </a:prstGeom>
+          <a:noFill/>
+          <a:extLst>
+            <a:ext uri="{909E8E84-426E-40DD-AFC4-6F175D3DCCD1}">
+              <a14:hiddenFill xmlns:a14="http://schemas.microsoft.com/office/drawing/2010/main">
+                <a:solidFill>
+                  <a:srgbClr val="FFFFFF"/>
+                </a:solidFill>
+              </a14:hiddenFill>
+            </a:ext>
+          </a:extLst>
+        </p:spPr>
+      </p:pic>
     </p:spTree>
     <p:extLst>
       <p:ext uri="{BB962C8B-B14F-4D97-AF65-F5344CB8AC3E}">
-        <p14:creationId xmlns:p14="http://schemas.microsoft.com/office/powerpoint/2010/main" val="1844178036"/>
+        <p14:creationId xmlns:p14="http://schemas.microsoft.com/office/powerpoint/2010/main" val="2726114901"/>
       </p:ext>
     </p:extLst>
   </p:cSld>
@@ -2652,63 +3625,151 @@
           <a:chExt cx="0" cy="0"/>
         </a:xfrm>
       </p:grpSpPr>
-      <p:sp>
-        <p:nvSpPr>
-          <p:cNvPr id="2" name="Title 1">
+      <p:pic>
+        <p:nvPicPr>
+          <p:cNvPr id="3074" name="Picture 2" descr="A diagram of a mathematical equation&#10;&#10;Description automatically generated">
             <a:extLst>
               <a:ext uri="{FF2B5EF4-FFF2-40B4-BE49-F238E27FC236}">
-                <a16:creationId xmlns:a16="http://schemas.microsoft.com/office/drawing/2014/main" id="{F7551151-AA7B-6805-F2CE-559FB5079863}"/>
+                <a16:creationId xmlns:a16="http://schemas.microsoft.com/office/drawing/2014/main" id="{1E43EC7C-DF87-E6E9-E369-F326B843BEB6}"/>
               </a:ext>
             </a:extLst>
           </p:cNvPr>
-          <p:cNvSpPr>
-            <a:spLocks noGrp="1"/>
-          </p:cNvSpPr>
-          <p:nvPr>
-            <p:ph type="title"/>
-          </p:nvPr>
-        </p:nvSpPr>
-        <p:spPr/>
-        <p:txBody>
-          <a:bodyPr/>
-          <a:lstStyle/>
-          <a:p>
-            <a:r>
-              <a:rPr lang="en-CZ" dirty="0"/>
-              <a:t>Mogonet</a:t>
-            </a:r>
-          </a:p>
-        </p:txBody>
-      </p:sp>
-      <p:sp>
-        <p:nvSpPr>
-          <p:cNvPr id="3" name="Content Placeholder 2">
+          <p:cNvPicPr>
+            <a:picLocks noGrp="1" noChangeAspect="1" noChangeArrowheads="1"/>
+          </p:cNvPicPr>
+          <p:nvPr>
+            <p:ph idx="1"/>
+          </p:nvPr>
+        </p:nvPicPr>
+        <p:blipFill>
+          <a:blip r:embed="rId3">
+            <a:extLst>
+              <a:ext uri="{28A0092B-C50C-407E-A947-70E740481C1C}">
+                <a14:useLocalDpi xmlns:a14="http://schemas.microsoft.com/office/drawing/2010/main" val="0"/>
+              </a:ext>
+            </a:extLst>
+          </a:blip>
+          <a:stretch>
+            <a:fillRect/>
+          </a:stretch>
+        </p:blipFill>
+        <p:spPr bwMode="auto">
+          <a:xfrm>
+            <a:off x="360000" y="1270418"/>
+            <a:ext cx="11472000" cy="2294400"/>
+          </a:xfrm>
+          <a:prstGeom prst="rect">
+            <a:avLst/>
+          </a:prstGeom>
+          <a:solidFill>
+            <a:srgbClr val="FFFFFF"/>
+          </a:solidFill>
+        </p:spPr>
+      </p:pic>
+      <p:pic>
+        <p:nvPicPr>
+          <p:cNvPr id="3076" name="Picture 4">
             <a:extLst>
               <a:ext uri="{FF2B5EF4-FFF2-40B4-BE49-F238E27FC236}">
-                <a16:creationId xmlns:a16="http://schemas.microsoft.com/office/drawing/2014/main" id="{CB185609-C4A2-C8FE-9C54-7E21E94CFBE6}"/>
+                <a16:creationId xmlns:a16="http://schemas.microsoft.com/office/drawing/2014/main" id="{A6051102-51B1-00F8-FB64-D891B904C368}"/>
               </a:ext>
             </a:extLst>
           </p:cNvPr>
-          <p:cNvSpPr>
-            <a:spLocks noGrp="1"/>
+          <p:cNvPicPr>
+            <a:picLocks noChangeAspect="1" noChangeArrowheads="1"/>
+          </p:cNvPicPr>
+          <p:nvPr/>
+        </p:nvPicPr>
+        <p:blipFill>
+          <a:blip r:embed="rId4">
+            <a:extLst>
+              <a:ext uri="{28A0092B-C50C-407E-A947-70E740481C1C}">
+                <a14:useLocalDpi xmlns:a14="http://schemas.microsoft.com/office/drawing/2010/main" val="0"/>
+              </a:ext>
+            </a:extLst>
+          </a:blip>
+          <a:srcRect/>
+          <a:stretch>
+            <a:fillRect/>
+          </a:stretch>
+        </p:blipFill>
+        <p:spPr bwMode="auto">
+          <a:xfrm>
+            <a:off x="692727" y="3564818"/>
+            <a:ext cx="10196946" cy="2903740"/>
+          </a:xfrm>
+          <a:prstGeom prst="rect">
+            <a:avLst/>
+          </a:prstGeom>
+          <a:noFill/>
+          <a:extLst>
+            <a:ext uri="{909E8E84-426E-40DD-AFC4-6F175D3DCCD1}">
+              <a14:hiddenFill xmlns:a14="http://schemas.microsoft.com/office/drawing/2010/main">
+                <a:solidFill>
+                  <a:srgbClr val="FFFFFF"/>
+                </a:solidFill>
+              </a14:hiddenFill>
+            </a:ext>
+          </a:extLst>
+        </p:spPr>
+      </p:pic>
+      <p:sp>
+        <p:nvSpPr>
+          <p:cNvPr id="4" name="Title 1">
+            <a:extLst>
+              <a:ext uri="{FF2B5EF4-FFF2-40B4-BE49-F238E27FC236}">
+                <a16:creationId xmlns:a16="http://schemas.microsoft.com/office/drawing/2014/main" id="{D22EB477-9D45-5474-BF7B-D192507435E9}"/>
+              </a:ext>
+            </a:extLst>
+          </p:cNvPr>
+          <p:cNvSpPr txBox="1">
+            <a:spLocks/>
           </p:cNvSpPr>
-          <p:nvPr>
-            <p:ph idx="1"/>
-          </p:nvPr>
+          <p:nvPr/>
         </p:nvSpPr>
-        <p:spPr/>
+        <p:spPr>
+          <a:xfrm>
+            <a:off x="3088691" y="389442"/>
+            <a:ext cx="10392000" cy="1087934"/>
+          </a:xfrm>
+          <a:prstGeom prst="rect">
+            <a:avLst/>
+          </a:prstGeom>
+        </p:spPr>
         <p:txBody>
           <a:bodyPr/>
-          <a:lstStyle/>
-          <a:p>
-            <a:endParaRPr lang="en-CZ"/>
+          <a:lstStyle>
+            <a:lvl1pPr algn="l" defTabSz="914332" rtl="0" eaLnBrk="1" latinLnBrk="0" hangingPunct="1">
+              <a:lnSpc>
+                <a:spcPct val="90000"/>
+              </a:lnSpc>
+              <a:spcBef>
+                <a:spcPct val="0"/>
+              </a:spcBef>
+              <a:buNone/>
+              <a:defRPr sz="4400" kern="1200">
+                <a:solidFill>
+                  <a:schemeClr val="tx1"/>
+                </a:solidFill>
+                <a:latin typeface="Technika-Bold" panose="00000600000000000000" pitchFamily="50" charset="-18"/>
+                <a:ea typeface="+mj-ea"/>
+                <a:cs typeface="+mj-cs"/>
+              </a:defRPr>
+            </a:lvl1pPr>
+          </a:lstStyle>
+          <a:p>
+            <a:r>
+              <a:rPr lang="en-CZ"/>
+              <a:t>Moglam</a:t>
+            </a:r>
+            <a:endParaRPr lang="en-CZ" dirty="0"/>
           </a:p>
         </p:txBody>
       </p:sp>
     </p:spTree>
     <p:extLst>
       <p:ext uri="{BB962C8B-B14F-4D97-AF65-F5344CB8AC3E}">
-        <p14:creationId xmlns:p14="http://schemas.microsoft.com/office/powerpoint/2010/main" val="2726114901"/>
+        <p14:creationId xmlns:p14="http://schemas.microsoft.com/office/powerpoint/2010/main" val="1007032359"/>
       </p:ext>
     </p:extLst>
   </p:cSld>
@@ -2735,110 +3796,59 @@
           <a:chExt cx="0" cy="0"/>
         </a:xfrm>
       </p:grpSpPr>
-      <p:sp>
-        <p:nvSpPr>
-          <p:cNvPr id="2" name="Title 1">
+      <p:pic>
+        <p:nvPicPr>
+          <p:cNvPr id="2050" name="Picture 2">
             <a:extLst>
               <a:ext uri="{FF2B5EF4-FFF2-40B4-BE49-F238E27FC236}">
-                <a16:creationId xmlns:a16="http://schemas.microsoft.com/office/drawing/2014/main" id="{7C9002A7-55E9-34CD-C6C3-B99F3B47DD7E}"/>
-              </a:ext>
-            </a:extLst>
-          </p:cNvPr>
-          <p:cNvSpPr>
-            <a:spLocks noGrp="1"/>
-          </p:cNvSpPr>
-          <p:nvPr>
-            <p:ph type="title"/>
-          </p:nvPr>
-        </p:nvSpPr>
-        <p:spPr/>
-        <p:txBody>
-          <a:bodyPr/>
-          <a:lstStyle/>
-          <a:p>
-            <a:r>
-              <a:rPr lang="en-CZ" dirty="0"/>
-              <a:t>Feature interactions</a:t>
-            </a:r>
-          </a:p>
-        </p:txBody>
-      </p:sp>
-      <p:sp>
-        <p:nvSpPr>
-          <p:cNvPr id="3" name="Content Placeholder 2">
-            <a:extLst>
-              <a:ext uri="{FF2B5EF4-FFF2-40B4-BE49-F238E27FC236}">
-                <a16:creationId xmlns:a16="http://schemas.microsoft.com/office/drawing/2014/main" id="{C398D06C-48B0-B30A-866C-061334B0A480}"/>
-              </a:ext>
-            </a:extLst>
-          </p:cNvPr>
-          <p:cNvSpPr>
-            <a:spLocks noGrp="1"/>
-          </p:cNvSpPr>
-          <p:nvPr>
-            <p:ph idx="1"/>
-          </p:nvPr>
-        </p:nvSpPr>
-        <p:spPr/>
-        <p:txBody>
-          <a:bodyPr>
-            <a:normAutofit/>
-          </a:bodyPr>
-          <a:lstStyle/>
-          <a:p>
-            <a:r>
-              <a:rPr lang="en-CZ" sz="2800" dirty="0"/>
-              <a:t>- gene - gene interactions</a:t>
-            </a:r>
-          </a:p>
-          <a:p>
-            <a:r>
-              <a:rPr lang="en-CZ" sz="2800" dirty="0"/>
-              <a:t>- protein - protein interactions</a:t>
-            </a:r>
-          </a:p>
-          <a:p>
-            <a:r>
-              <a:rPr lang="en-CZ" sz="2800" dirty="0"/>
-              <a:t>- miRNA - gene interactions</a:t>
-            </a:r>
-          </a:p>
-        </p:txBody>
-      </p:sp>
-      <p:pic>
-        <p:nvPicPr>
-          <p:cNvPr id="4" name="Picture 3">
-            <a:extLst>
-              <a:ext uri="{FF2B5EF4-FFF2-40B4-BE49-F238E27FC236}">
-                <a16:creationId xmlns:a16="http://schemas.microsoft.com/office/drawing/2014/main" id="{74FDF85B-1978-9F93-8BB4-E52F9B23063F}"/>
+                <a16:creationId xmlns:a16="http://schemas.microsoft.com/office/drawing/2014/main" id="{C4229657-9055-BC3C-9A34-0EF933ED1A4C}"/>
               </a:ext>
             </a:extLst>
           </p:cNvPr>
           <p:cNvPicPr>
-            <a:picLocks noChangeAspect="1"/>
+            <a:picLocks noGrp="1" noChangeAspect="1" noChangeArrowheads="1"/>
           </p:cNvPicPr>
-          <p:nvPr/>
+          <p:nvPr>
+            <p:ph idx="1"/>
+          </p:nvPr>
         </p:nvPicPr>
         <p:blipFill>
-          <a:blip r:embed="rId2"/>
+          <a:blip r:embed="rId2">
+            <a:extLst>
+              <a:ext uri="{28A0092B-C50C-407E-A947-70E740481C1C}">
+                <a14:useLocalDpi xmlns:a14="http://schemas.microsoft.com/office/drawing/2010/main" val="0"/>
+              </a:ext>
+            </a:extLst>
+          </a:blip>
+          <a:srcRect/>
           <a:stretch>
             <a:fillRect/>
           </a:stretch>
         </p:blipFill>
-        <p:spPr>
+        <p:spPr bwMode="auto">
           <a:xfrm>
-            <a:off x="5970843" y="816966"/>
-            <a:ext cx="5861157" cy="5770800"/>
+            <a:off x="1964682" y="1144638"/>
+            <a:ext cx="8800300" cy="5331713"/>
           </a:xfrm>
           <a:prstGeom prst="rect">
             <a:avLst/>
           </a:prstGeom>
+          <a:noFill/>
+          <a:extLst>
+            <a:ext uri="{909E8E84-426E-40DD-AFC4-6F175D3DCCD1}">
+              <a14:hiddenFill xmlns:a14="http://schemas.microsoft.com/office/drawing/2010/main">
+                <a:solidFill>
+                  <a:srgbClr val="FFFFFF"/>
+                </a:solidFill>
+              </a14:hiddenFill>
+            </a:ext>
+          </a:extLst>
         </p:spPr>
       </p:pic>
     </p:spTree>
     <p:extLst>
       <p:ext uri="{BB962C8B-B14F-4D97-AF65-F5344CB8AC3E}">
-        <p14:creationId xmlns:p14="http://schemas.microsoft.com/office/powerpoint/2010/main" val="3947280238"/>
+        <p14:creationId xmlns:p14="http://schemas.microsoft.com/office/powerpoint/2010/main" val="1011778261"/>
       </p:ext>
     </p:extLst>
   </p:cSld>
@@ -3047,4 +4057,299 @@
     </a:ext>
   </a:extLst>
 </a:theme>
+</file>
+
+<file path=ppt/theme/theme2.xml><?xml version="1.0" encoding="utf-8"?>
+<a:theme xmlns:a="http://schemas.openxmlformats.org/drawingml/2006/main" name="Office Theme">
+  <a:themeElements>
+    <a:clrScheme name="Office">
+      <a:dk1>
+        <a:sysClr val="windowText" lastClr="000000"/>
+      </a:dk1>
+      <a:lt1>
+        <a:sysClr val="window" lastClr="FFFFFF"/>
+      </a:lt1>
+      <a:dk2>
+        <a:srgbClr val="44546A"/>
+      </a:dk2>
+      <a:lt2>
+        <a:srgbClr val="E7E6E6"/>
+      </a:lt2>
+      <a:accent1>
+        <a:srgbClr val="4472C4"/>
+      </a:accent1>
+      <a:accent2>
+        <a:srgbClr val="ED7D31"/>
+      </a:accent2>
+      <a:accent3>
+        <a:srgbClr val="A5A5A5"/>
+      </a:accent3>
+      <a:accent4>
+        <a:srgbClr val="FFC000"/>
+      </a:accent4>
+      <a:accent5>
+        <a:srgbClr val="5B9BD5"/>
+      </a:accent5>
+      <a:accent6>
+        <a:srgbClr val="70AD47"/>
+      </a:accent6>
+      <a:hlink>
+        <a:srgbClr val="0563C1"/>
+      </a:hlink>
+      <a:folHlink>
+        <a:srgbClr val="954F72"/>
+      </a:folHlink>
+    </a:clrScheme>
+    <a:fontScheme name="Office">
+      <a:majorFont>
+        <a:latin typeface="Calibri Light" panose="020F0302020204030204"/>
+        <a:ea typeface=""/>
+        <a:cs typeface=""/>
+        <a:font script="Jpan" typeface="游ゴシック Light"/>
+        <a:font script="Hang" typeface="맑은 고딕"/>
+        <a:font script="Hans" typeface="等线 Light"/>
+        <a:font script="Hant" typeface="新細明體"/>
+        <a:font script="Arab" typeface="Times New Roman"/>
+        <a:font script="Hebr" typeface="Times New Roman"/>
+        <a:font script="Thai" typeface="Angsana New"/>
+        <a:font script="Ethi" typeface="Nyala"/>
+        <a:font script="Beng" typeface="Vrinda"/>
+        <a:font script="Gujr" typeface="Shruti"/>
+        <a:font script="Khmr" typeface="MoolBoran"/>
+        <a:font script="Knda" typeface="Tunga"/>
+        <a:font script="Guru" typeface="Raavi"/>
+        <a:font script="Cans" typeface="Euphemia"/>
+        <a:font script="Cher" typeface="Plantagenet Cherokee"/>
+        <a:font script="Yiii" typeface="Microsoft Yi Baiti"/>
+        <a:font script="Tibt" typeface="Microsoft Himalaya"/>
+        <a:font script="Thaa" typeface="MV Boli"/>
+        <a:font script="Deva" typeface="Mangal"/>
+        <a:font script="Telu" typeface="Gautami"/>
+        <a:font script="Taml" typeface="Latha"/>
+        <a:font script="Syrc" typeface="Estrangelo Edessa"/>
+        <a:font script="Orya" typeface="Kalinga"/>
+        <a:font script="Mlym" typeface="Kartika"/>
+        <a:font script="Laoo" typeface="DokChampa"/>
+        <a:font script="Sinh" typeface="Iskoola Pota"/>
+        <a:font script="Mong" typeface="Mongolian Baiti"/>
+        <a:font script="Viet" typeface="Times New Roman"/>
+        <a:font script="Uigh" typeface="Microsoft Uighur"/>
+        <a:font script="Geor" typeface="Sylfaen"/>
+        <a:font script="Armn" typeface="Arial"/>
+        <a:font script="Bugi" typeface="Leelawadee UI"/>
+        <a:font script="Bopo" typeface="Microsoft JhengHei"/>
+        <a:font script="Java" typeface="Javanese Text"/>
+        <a:font script="Lisu" typeface="Segoe UI"/>
+        <a:font script="Mymr" typeface="Myanmar Text"/>
+        <a:font script="Nkoo" typeface="Ebrima"/>
+        <a:font script="Olck" typeface="Nirmala UI"/>
+        <a:font script="Osma" typeface="Ebrima"/>
+        <a:font script="Phag" typeface="Phagspa"/>
+        <a:font script="Syrn" typeface="Estrangelo Edessa"/>
+        <a:font script="Syrj" typeface="Estrangelo Edessa"/>
+        <a:font script="Syre" typeface="Estrangelo Edessa"/>
+        <a:font script="Sora" typeface="Nirmala UI"/>
+        <a:font script="Tale" typeface="Microsoft Tai Le"/>
+        <a:font script="Talu" typeface="Microsoft New Tai Lue"/>
+        <a:font script="Tfng" typeface="Ebrima"/>
+      </a:majorFont>
+      <a:minorFont>
+        <a:latin typeface="Calibri" panose="020F0502020204030204"/>
+        <a:ea typeface=""/>
+        <a:cs typeface=""/>
+        <a:font script="Jpan" typeface="游ゴシック"/>
+        <a:font script="Hang" typeface="맑은 고딕"/>
+        <a:font script="Hans" typeface="等线"/>
+        <a:font script="Hant" typeface="新細明體"/>
+        <a:font script="Arab" typeface="Arial"/>
+        <a:font script="Hebr" typeface="Arial"/>
+        <a:font script="Thai" typeface="Cordia New"/>
+        <a:font script="Ethi" typeface="Nyala"/>
+        <a:font script="Beng" typeface="Vrinda"/>
+        <a:font script="Gujr" typeface="Shruti"/>
+        <a:font script="Khmr" typeface="DaunPenh"/>
+        <a:font script="Knda" typeface="Tunga"/>
+        <a:font script="Guru" typeface="Raavi"/>
+        <a:font script="Cans" typeface="Euphemia"/>
+        <a:font script="Cher" typeface="Plantagenet Cherokee"/>
+        <a:font script="Yiii" typeface="Microsoft Yi Baiti"/>
+        <a:font script="Tibt" typeface="Microsoft Himalaya"/>
+        <a:font script="Thaa" typeface="MV Boli"/>
+        <a:font script="Deva" typeface="Mangal"/>
+        <a:font script="Telu" typeface="Gautami"/>
+        <a:font script="Taml" typeface="Latha"/>
+        <a:font script="Syrc" typeface="Estrangelo Edessa"/>
+        <a:font script="Orya" typeface="Kalinga"/>
+        <a:font script="Mlym" typeface="Kartika"/>
+        <a:font script="Laoo" typeface="DokChampa"/>
+        <a:font script="Sinh" typeface="Iskoola Pota"/>
+        <a:font script="Mong" typeface="Mongolian Baiti"/>
+        <a:font script="Viet" typeface="Arial"/>
+        <a:font script="Uigh" typeface="Microsoft Uighur"/>
+        <a:font script="Geor" typeface="Sylfaen"/>
+        <a:font script="Armn" typeface="Arial"/>
+        <a:font script="Bugi" typeface="Leelawadee UI"/>
+        <a:font script="Bopo" typeface="Microsoft JhengHei"/>
+        <a:font script="Java" typeface="Javanese Text"/>
+        <a:font script="Lisu" typeface="Segoe UI"/>
+        <a:font script="Mymr" typeface="Myanmar Text"/>
+        <a:font script="Nkoo" typeface="Ebrima"/>
+        <a:font script="Olck" typeface="Nirmala UI"/>
+        <a:font script="Osma" typeface="Ebrima"/>
+        <a:font script="Phag" typeface="Phagspa"/>
+        <a:font script="Syrn" typeface="Estrangelo Edessa"/>
+        <a:font script="Syrj" typeface="Estrangelo Edessa"/>
+        <a:font script="Syre" typeface="Estrangelo Edessa"/>
+        <a:font script="Sora" typeface="Nirmala UI"/>
+        <a:font script="Tale" typeface="Microsoft Tai Le"/>
+        <a:font script="Talu" typeface="Microsoft New Tai Lue"/>
+        <a:font script="Tfng" typeface="Ebrima"/>
+      </a:minorFont>
+    </a:fontScheme>
+    <a:fmtScheme name="Office">
+      <a:fillStyleLst>
+        <a:solidFill>
+          <a:schemeClr val="phClr"/>
+        </a:solidFill>
+        <a:gradFill rotWithShape="1">
+          <a:gsLst>
+            <a:gs pos="0">
+              <a:schemeClr val="phClr">
+                <a:lumMod val="110000"/>
+                <a:satMod val="105000"/>
+                <a:tint val="67000"/>
+              </a:schemeClr>
+            </a:gs>
+            <a:gs pos="50000">
+              <a:schemeClr val="phClr">
+                <a:lumMod val="105000"/>
+                <a:satMod val="103000"/>
+                <a:tint val="73000"/>
+              </a:schemeClr>
+            </a:gs>
+            <a:gs pos="100000">
+              <a:schemeClr val="phClr">
+                <a:lumMod val="105000"/>
+                <a:satMod val="109000"/>
+                <a:tint val="81000"/>
+              </a:schemeClr>
+            </a:gs>
+          </a:gsLst>
+          <a:lin ang="5400000" scaled="0"/>
+        </a:gradFill>
+        <a:gradFill rotWithShape="1">
+          <a:gsLst>
+            <a:gs pos="0">
+              <a:schemeClr val="phClr">
+                <a:satMod val="103000"/>
+                <a:lumMod val="102000"/>
+                <a:tint val="94000"/>
+              </a:schemeClr>
+            </a:gs>
+            <a:gs pos="50000">
+              <a:schemeClr val="phClr">
+                <a:satMod val="110000"/>
+                <a:lumMod val="100000"/>
+                <a:shade val="100000"/>
+              </a:schemeClr>
+            </a:gs>
+            <a:gs pos="100000">
+              <a:schemeClr val="phClr">
+                <a:lumMod val="99000"/>
+                <a:satMod val="120000"/>
+                <a:shade val="78000"/>
+              </a:schemeClr>
+            </a:gs>
+          </a:gsLst>
+          <a:lin ang="5400000" scaled="0"/>
+        </a:gradFill>
+      </a:fillStyleLst>
+      <a:lnStyleLst>
+        <a:ln w="6350" cap="flat" cmpd="sng" algn="ctr">
+          <a:solidFill>
+            <a:schemeClr val="phClr"/>
+          </a:solidFill>
+          <a:prstDash val="solid"/>
+          <a:miter lim="800000"/>
+        </a:ln>
+        <a:ln w="12700" cap="flat" cmpd="sng" algn="ctr">
+          <a:solidFill>
+            <a:schemeClr val="phClr"/>
+          </a:solidFill>
+          <a:prstDash val="solid"/>
+          <a:miter lim="800000"/>
+        </a:ln>
+        <a:ln w="19050" cap="flat" cmpd="sng" algn="ctr">
+          <a:solidFill>
+            <a:schemeClr val="phClr"/>
+          </a:solidFill>
+          <a:prstDash val="solid"/>
+          <a:miter lim="800000"/>
+        </a:ln>
+      </a:lnStyleLst>
+      <a:effectStyleLst>
+        <a:effectStyle>
+          <a:effectLst/>
+        </a:effectStyle>
+        <a:effectStyle>
+          <a:effectLst/>
+        </a:effectStyle>
+        <a:effectStyle>
+          <a:effectLst>
+            <a:outerShdw blurRad="57150" dist="19050" dir="5400000" algn="ctr" rotWithShape="0">
+              <a:srgbClr val="000000">
+                <a:alpha val="63000"/>
+              </a:srgbClr>
+            </a:outerShdw>
+          </a:effectLst>
+        </a:effectStyle>
+      </a:effectStyleLst>
+      <a:bgFillStyleLst>
+        <a:solidFill>
+          <a:schemeClr val="phClr"/>
+        </a:solidFill>
+        <a:solidFill>
+          <a:schemeClr val="phClr">
+            <a:tint val="95000"/>
+            <a:satMod val="170000"/>
+          </a:schemeClr>
+        </a:solidFill>
+        <a:gradFill rotWithShape="1">
+          <a:gsLst>
+            <a:gs pos="0">
+              <a:schemeClr val="phClr">
+                <a:tint val="93000"/>
+                <a:satMod val="150000"/>
+                <a:shade val="98000"/>
+                <a:lumMod val="102000"/>
+              </a:schemeClr>
+            </a:gs>
+            <a:gs pos="50000">
+              <a:schemeClr val="phClr">
+                <a:tint val="98000"/>
+                <a:satMod val="130000"/>
+                <a:shade val="90000"/>
+                <a:lumMod val="103000"/>
+              </a:schemeClr>
+            </a:gs>
+            <a:gs pos="100000">
+              <a:schemeClr val="phClr">
+                <a:shade val="63000"/>
+                <a:satMod val="120000"/>
+              </a:schemeClr>
+            </a:gs>
+          </a:gsLst>
+          <a:lin ang="5400000" scaled="0"/>
+        </a:gradFill>
+      </a:bgFillStyleLst>
+    </a:fmtScheme>
+  </a:themeElements>
+  <a:objectDefaults/>
+  <a:extraClrSchemeLst/>
+  <a:extLst>
+    <a:ext uri="{05A4C25C-085E-4340-85A3-A5531E510DB2}">
+      <thm15:themeFamily xmlns:thm15="http://schemas.microsoft.com/office/thememl/2012/main" name="Office Theme" id="{62F939B6-93AF-4DB8-9C6B-D6C7DFDC589F}" vid="{4A3C46E8-61CC-4603-A589-7422A47A8E4A}"/>
+    </a:ext>
+  </a:extLst>
+</a:theme>
 </file>